--- a/acceptance/samples/deck-A-纸面编辑体.pptx
+++ b/acceptance/samples/deck-A-纸面编辑体.pptx
@@ -342,12 +342,25 @@
           </c:tx>
           <c:spPr>
             <a:solidFill>
-              <a:srgbClr val="84807A"/>
+              <a:srgbClr val="12120F"/>
             </a:solidFill>
             <a:ln>
               <a:noFill/>
             </a:ln>
           </c:spPr>
+          <c:dPt>
+            <c:idx val="2"/>
+            <c:spPr>
+              <a:solidFill>
+                <a:srgbClr val="6E6A63"/>
+              </a:solidFill>
+              <a:ln>
+                <a:solidFill>
+                  <a:srgbClr val="6E6A63"/>
+                </a:solidFill>
+              </a:ln>
+            </c:spPr>
+          </c:dPt>
           <c:cat>
             <c:strRef>
               <c:f>Sheet1!$A$2:$A$4</c:f>
@@ -455,7 +468,9 @@
       </c:catAx>
       <c:valAx>
         <c:axId val="-2113994440"/>
-        <c:scaling/>
+        <c:scaling>
+          <c:max val="21.849999999999998"/>
+        </c:scaling>
         <c:delete val="0"/>
         <c:axPos val="l"/>
         <c:majorTickMark val="out"/>
@@ -5067,8 +5082,8 @@
         </p:nvSpPr>
         <p:spPr>
           <a:xfrm>
-            <a:off x="4191000" y="2971800"/>
-            <a:ext cx="4000500" cy="1143000"/>
+            <a:off x="3962400" y="2971800"/>
+            <a:ext cx="4229100" cy="1143000"/>
           </a:xfrm>
           <a:prstGeom prst="rect">
             <a:avLst/>
@@ -5084,11 +5099,11 @@
           <a:p>
             <a:pPr algn="l">
               <a:lnSpc>
-                <a:spcPts val="2475"/>
+                <a:spcPts val="2812"/>
               </a:lnSpc>
             </a:pPr>
             <a:r>
-              <a:rPr sz="1650" b="0" i="0">
+              <a:rPr sz="1875" b="1" i="0">
                 <a:solidFill>
                   <a:srgbClr val="12120F"/>
                 </a:solidFill>
@@ -5109,8 +5124,8 @@
         </p:nvSpPr>
         <p:spPr>
           <a:xfrm>
-            <a:off x="4191000" y="4343400"/>
-            <a:ext cx="5334000" cy="762000"/>
+            <a:off x="3962400" y="4343400"/>
+            <a:ext cx="5562600" cy="762000"/>
           </a:xfrm>
           <a:prstGeom prst="rect">
             <a:avLst/>
